--- a/decks/Microsoft Foundry Voice Live-Voice Agents.pptx
+++ b/decks/Microsoft Foundry Voice Live-Voice Agents.pptx
@@ -134,6 +134,83 @@
 </p:presentation>
 </file>
 
+<file path=ppt/changesInfos/changesInfo1.xml><?xml version="1.0" encoding="utf-8"?>
+<pc:chgInfo xmlns:a="http://schemas.openxmlformats.org/drawingml/2006/main" xmlns:r="http://schemas.openxmlformats.org/officeDocument/2006/relationships" xmlns:ac="http://schemas.microsoft.com/office/drawing/2013/main/command" xmlns:pc="http://schemas.microsoft.com/office/powerpoint/2013/main/command">
+  <pc:docChgLst>
+    <pc:chgData clId="Web-{E967385A-3EFF-47ED-BAA5-95E269968DCA}"/>
+    <pc:docChg chg="modSld">
+      <pc:chgData name="" userId="" providerId="" clId="Web-{E967385A-3EFF-47ED-BAA5-95E269968DCA}" dt="2026-10-14T14:09:48.195" v="0" actId="34807"/>
+      <pc:docMkLst>
+        <pc:docMk/>
+      </pc:docMkLst>
+      <pc:sldChg chg="modNotesTx">
+        <pc:chgData name="" userId="" providerId="" clId="Web-{E967385A-3EFF-47ED-BAA5-95E269968DCA}" dt="2026-10-14T14:09:48.195" v="0" actId="34807"/>
+        <pc:sldMkLst>
+          <pc:docMk/>
+          <pc:sldMk cId="0" sldId="256"/>
+        </pc:sldMkLst>
+      </pc:sldChg>
+      <pc:sldChg chg="modNotesTx">
+        <pc:chgData name="" userId="" providerId="" clId="Web-{E967385A-3EFF-47ED-BAA5-95E269968DCA}" dt="2026-10-14T14:09:48.195" v="0" actId="34807"/>
+        <pc:sldMkLst>
+          <pc:docMk/>
+          <pc:sldMk cId="0" sldId="257"/>
+        </pc:sldMkLst>
+      </pc:sldChg>
+      <pc:sldChg chg="modNotesTx">
+        <pc:chgData name="" userId="" providerId="" clId="Web-{E967385A-3EFF-47ED-BAA5-95E269968DCA}" dt="2026-10-14T14:09:48.195" v="0" actId="34807"/>
+        <pc:sldMkLst>
+          <pc:docMk/>
+          <pc:sldMk cId="0" sldId="258"/>
+        </pc:sldMkLst>
+      </pc:sldChg>
+      <pc:sldChg chg="modNotesTx">
+        <pc:chgData name="" userId="" providerId="" clId="Web-{E967385A-3EFF-47ED-BAA5-95E269968DCA}" dt="2026-10-14T14:09:48.195" v="0" actId="34807"/>
+        <pc:sldMkLst>
+          <pc:docMk/>
+          <pc:sldMk cId="0" sldId="259"/>
+        </pc:sldMkLst>
+      </pc:sldChg>
+      <pc:sldChg chg="modNotesTx">
+        <pc:chgData name="" userId="" providerId="" clId="Web-{E967385A-3EFF-47ED-BAA5-95E269968DCA}" dt="2026-10-14T14:09:48.195" v="0" actId="34807"/>
+        <pc:sldMkLst>
+          <pc:docMk/>
+          <pc:sldMk cId="0" sldId="260"/>
+        </pc:sldMkLst>
+      </pc:sldChg>
+      <pc:sldChg chg="modNotesTx">
+        <pc:chgData name="" userId="" providerId="" clId="Web-{E967385A-3EFF-47ED-BAA5-95E269968DCA}" dt="2026-10-14T14:09:48.195" v="0" actId="34807"/>
+        <pc:sldMkLst>
+          <pc:docMk/>
+          <pc:sldMk cId="0" sldId="261"/>
+        </pc:sldMkLst>
+      </pc:sldChg>
+      <pc:sldChg chg="modNotesTx">
+        <pc:chgData name="" userId="" providerId="" clId="Web-{E967385A-3EFF-47ED-BAA5-95E269968DCA}" dt="2026-10-14T14:09:48.195" v="0" actId="34807"/>
+        <pc:sldMkLst>
+          <pc:docMk/>
+          <pc:sldMk cId="0" sldId="262"/>
+        </pc:sldMkLst>
+      </pc:sldChg>
+      <pc:sldChg chg="modNotesTx">
+        <pc:chgData name="" userId="" providerId="" clId="Web-{E967385A-3EFF-47ED-BAA5-95E269968DCA}" dt="2026-10-14T14:09:48.195" v="0" actId="34807"/>
+        <pc:sldMkLst>
+          <pc:docMk/>
+          <pc:sldMk cId="0" sldId="263"/>
+        </pc:sldMkLst>
+      </pc:sldChg>
+      <pc:sldChg chg="modNotesTx">
+        <pc:chgData name="" userId="" providerId="" clId="Web-{E967385A-3EFF-47ED-BAA5-95E269968DCA}" dt="2026-10-14T14:09:48.195" v="0" actId="34807"/>
+        <pc:sldMkLst>
+          <pc:docMk/>
+          <pc:sldMk cId="0" sldId="264"/>
+        </pc:sldMkLst>
+      </pc:sldChg>
+    </pc:docChg>
+  </pc:docChgLst>
+</pc:chgInfo>
+</file>
+
 <file path=ppt/notesMasters/notesMaster1.xml><?xml version="1.0" encoding="utf-8"?>
 <p:notesMaster xmlns:a="http://schemas.openxmlformats.org/drawingml/2006/main" xmlns:r="http://schemas.openxmlformats.org/officeDocument/2006/relationships" xmlns:p="http://schemas.openxmlformats.org/presentationml/2006/main">
   <p:cSld>
@@ -215,7 +292,7 @@
           </a:lstStyle>
           <a:p>
             <a:fld id="{0E801E4C-4AEE-4CC9-BDAE-CBDFC4207C92}" type="datetimeFigureOut">
-              <a:t>11/10/2026</a:t>
+              <a:t>10/14/2026</a:t>
             </a:fld>
             <a:endParaRPr lang="en-US"/>
           </a:p>
@@ -526,33 +603,21 @@
           <a:lstStyle/>
           <a:p>
             <a:r>
-              <a:t>This session covers real-time voice in Microsoft Foundry. Two names come up constantly and they are easy to mix up, so I will separate them from the start.</a:t>
-            </a:r>
-          </a:p>
-          <a:p>
-            <a:r>
-              <a:t>The Voice Live API is a managed speech-to-speech runtime in Azure Speech. It has been generally available since November 2025, and connecting it to an existing Foundry agent has been generally available since April 2026.</a:t>
-            </a:r>
-          </a:p>
-          <a:p>
-            <a:r>
-              <a:t>Foundry voice agents are newer. Since 24 September 2026 they have been a public preview agent type in Foundry Agent Service. You describe the model, instructions, audio settings and tools in one agent definition, and the agent still runs on Voice Live underneath.</a:t>
-            </a:r>
-          </a:p>
-          <a:p>
-            <a:r>
-              <a:t>So the plan is: what problem the runtime solves; the ways to build on it; how a session actually works; the two model architectures; what a voice agent definition contains; two short examples; how it compares with the Azure OpenAI Realtime API; and how to choose.</a:t>
-            </a:r>
-          </a:p>
-          <a:p>
-            <a:r>
-              <a:t>Every fact was checked against Microsoft Learn on 2 October 2026. Anything marked with an asterisk is preview, which means no service level agreement.</a:t>
-            </a:r>
-          </a:p>
-          <a:p>
-            <a:r>
-              <a:t>Likely question: is Voice Live being replaced by voice agents? No. Microsoft states that all approaches remain supported.</a:t>
-            </a:r>
+              <a:rPr lang="en-US"/>
+              <a:t>This session covers real-time voice in Microsoft Foundry. Two names come up constantly and they are easy to mix up, so the session separates them from the start.
+First, the Voice Live API.
+It is a managed speech-to-speech runtime in Azure Speech. It has been generally available since November 2025, and connecting it to an existing Foundry agent has been generally available since April 2026.
+Second, Foundry voice agents.
+They are newer. Since 24 September 2026 they have been a public preview agent type in Foundry Agent Service. The model, instructions, audio settings and tools are described in one agent definition, and the agent still runs on Voice Live underneath.
+We begin with the problem the runtime solves and the ways to build on it.
+We then examine how a session actually works and the two model architectures.
+The third section covers what a voice agent definition contains, with two short examples.
+We close with how the options compare with the Azure OpenAI Realtime API, and how to choose between them.
+Every fact was checked against Microsoft Learn on 2 October 2026. Anything marked with an asterisk is preview, which means no service level agreement.
+A common question is whether Voice Live is being replaced by voice agents. It is not: Microsoft states that all approaches remain supported.
+The overall narrative is simple: Voice Live is the speech runtime underneath every option, and the choice between the options is about where the conversation logic is defined and which release status the customer can accept.</a:t>
+            </a:r>
+            <a:endParaRPr/>
           </a:p>
         </p:txBody>
       </p:sp>
@@ -621,33 +686,20 @@
           <a:lstStyle/>
           <a:p>
             <a:r>
-              <a:t>The takeaway: Voice Live removes the work of chaining speech services together.</a:t>
-            </a:r>
-          </a:p>
-          <a:p>
-            <a:r>
-              <a:t>On the left is the traditional design. You call speech to text, pass the transcript to a language model, and send the reply to text to speech. Learn names the two costs: engineering complexity and latency the caller can hear. Each hop adds delay. You also end up writing the hard conversational parts yourself, such as deciding when the caller has finished speaking and what to do when they interrupt.</a:t>
-            </a:r>
-          </a:p>
-          <a:p>
-            <a:r>
-              <a:t>On the right, Voice Live puts all three stages behind one WebSocket session. The service manages the orchestration. You send audio and get back audio, plus avatar video and tool-call events if you use them.</a:t>
-            </a:r>
-          </a:p>
-          <a:p>
-            <a:r>
-              <a:t>The six cards are what Learn calls conversational enhancements. They matter on real phone lines: echo cancellation stops the agent hearing itself on a speakerphone, and end-of-turn detection stops it cutting someone off mid-sentence.</a:t>
-            </a:r>
-          </a:p>
-          <a:p>
-            <a:r>
-              <a:t>The events follow the Azure OpenAI Realtime API, so existing clients can move with few changes. Source: learn.microsoft.com/azure/ai-services/speech-service/voice-live.</a:t>
-            </a:r>
-          </a:p>
-          <a:p>
-            <a:r>
-              <a:t>Likely question: do I need to deploy a speech model first? No. Voice Live is fully managed. Bring-your-own-model is the exception, and slide 5 covers it.</a:t>
-            </a:r>
+              <a:rPr lang="en-US"/>
+              <a:t>This slide compares two ways to build a voice experience. Read it from left to right: a self-built pipeline of three separate services, and the Voice Live API as one managed runtime.
+The core idea is that Voice Live removes the work of chaining speech services together.
+First, the self-built pipeline.
+This is the traditional design. The application calls speech to text, passes the transcript to a language model, and sends the reply to text to speech. The official documentation names two costs: engineering complexity and latency the caller can hear. Each hop adds delay. The development team also ends up writing the hard conversational parts itself, such as deciding when the caller has finished speaking and what to do when the caller interrupts.
+Second, the Voice Live API.
+Voice Live puts all three stages behind one WebSocket session, and the service manages the orchestration. The client application sends audio and gets back audio, plus avatar video and tool-call events if they are used.
+Third, the conversational enhancements.
+The six cards are what the official documentation calls conversational enhancements. They matter on real phone lines: echo cancellation stops the agent hearing itself on a speakerphone, and end-of-turn detection stops it cutting someone off mid-sentence.
+The events follow the Azure OpenAI Realtime API, so existing clients can move with few changes. The source for this slide is the Voice Live overview page, learn.microsoft.com/azure/ai-services/speech-service/voice-live.
+A common question is whether a speech model has to be deployed first. It does not: Voice Live is fully managed. The exception is a model the customer brings itself, and slide 5 covers it.
+The key takeaway is that Voice Live replaces three separately integrated services with one managed session, and takes over the turn-taking and interruption handling that teams would otherwise build in application code.</a:t>
+            </a:r>
+            <a:endParaRPr/>
           </a:p>
         </p:txBody>
       </p:sp>
@@ -716,38 +768,21 @@
           <a:lstStyle/>
           <a:p>
             <a:r>
-              <a:t>This is the slide to anchor on. All three paths use Voice Live for speech recognition, turn-taking and speech synthesis. They differ in one thing: where the conversation logic lives.</a:t>
-            </a:r>
-          </a:p>
-          <a:p>
-            <a:r>
-              <a:t>Path one, Voice Live with a model. Your application sends the instructions and tool definitions in a session.update event. This is the closest match to the Azure OpenAI Realtime API.</a:t>
-            </a:r>
-          </a:p>
-          <a:p>
-            <a:r>
-              <a:t>Path two, Voice Live with a Foundry agent. Your client connects by agent name and project name. The prompt agent or hosted agent you already run does the reasoning, and Voice Live handles listening and speaking. This has been generally available since April 2026.</a:t>
-            </a:r>
-          </a:p>
-          <a:p>
-            <a:r>
-              <a:t>Path three, the Foundry voice agent: a new agent kind, preview since 24 September. One versioned definition holds the model, instructions, audio settings and tools, and you get built-in telephony and voice-pipeline tracing.</a:t>
-            </a:r>
-          </a:p>
-          <a:p>
-            <a:r>
-              <a:t>One constraint: you can't convert an existing text agent into a voice agent. You can keep it as a subagent of a new voice agent.</a:t>
-            </a:r>
-          </a:p>
-          <a:p>
-            <a:r>
-              <a:t>Sources: Learn foundry/agents/overview, and the Tech Community post "Introducing voice agents in Microsoft Foundry".</a:t>
-            </a:r>
-          </a:p>
-          <a:p>
-            <a:r>
-              <a:t>Likely question: should we wait for voice agents to reach general availability? If you need a service level agreement now, use path two.</a:t>
-            </a:r>
+              <a:rPr lang="en-US"/>
+              <a:t>This slide compares the three ways to add voice in Foundry, and it is the slide to anchor on. Read it from left to right: path one, path two and path three.
+The core idea is that all three paths use Voice Live for speech recognition, turn-taking and speech synthesis. They differ in one thing: where the conversation logic lives.
+First, Voice Live with a model.
+The client application sends the instructions and tool definitions in a session.update event. This is the closest match to the Azure OpenAI Realtime API.
+Second, Voice Live with a Foundry agent.
+The client connects by agent name and project name. The prompt agent or hosted agent the customer already runs does the reasoning, and Voice Live handles listening and speaking. This path has been generally available since April 2026.
+Third, the Foundry voice agent.
+This is a new agent kind, in preview since 24 September. One versioned definition holds the model, instructions, audio settings and tools, and the agent comes with built-in telephony and voice-pipeline tracing.
+One constraint applies. An existing text agent cannot be converted into a voice agent. However, it can be kept as a subagent of a new voice agent.
+The sources are the Foundry agents overview page in the official documentation, foundry/agents/overview, and the Tech Community post "Introducing voice agents in Microsoft Foundry".
+A common question is whether to wait for voice agents to reach general availability. On that, the guidance is straightforward: a customer that needs a service level agreement now should use path two.
+The key takeaway is that the speech layer is the same in every path, so the decision comes down to where the conversation logic should live and whether the customer can work with a preview.</a:t>
+            </a:r>
+            <a:endParaRPr/>
           </a:p>
         </p:txBody>
       </p:sp>
@@ -816,48 +851,25 @@
           <a:lstStyle/>
           <a:p>
             <a:r>
-              <a:t>Let me walk the numbers.</a:t>
-            </a:r>
-          </a:p>
-          <a:p>
-            <a:r>
-              <a:t>Step one: the client gets a Microsoft Entra ID token and opens a WebSocket to the Foundry resource endpoint, path voice-live/realtime. Entra ID is the recommended option. An API key also works, except in agent mode.</a:t>
-            </a:r>
-          </a:p>
-          <a:p>
-            <a:r>
-              <a:t>Step two: the first event is normally session.update, which sets the voice, turn detection and noise options. The service replies session.updated, and the client then streams audio chunks with input_audio_buffer.append.</a:t>
-            </a:r>
-          </a:p>
-          <a:p>
-            <a:r>
-              <a:t>Step three: noise suppression and echo cancellation clean the audio. Turn detection decides when the caller has finished speaking, and recognition produces the transcript.</a:t>
-            </a:r>
-          </a:p>
-          <a:p>
-            <a:r>
-              <a:t>Step four: the model reasons and may call tools. These can be functions your client runs, remote Model Context Protocol servers, a Foundry agent, or built-in search.</a:t>
-            </a:r>
-          </a:p>
-          <a:p>
-            <a:r>
-              <a:t>Step five: speech synthesis streams the reply back as response.audio.delta events, with avatar video if you configured one.</a:t>
-            </a:r>
-          </a:p>
-          <a:p>
-            <a:r>
-              <a:t>Barge-in is on by default. Learn recommends WebRTC for browser clients; WebRTC is preview.</a:t>
-            </a:r>
-          </a:p>
-          <a:p>
-            <a:r>
-              <a:t>Limits: up to 60 minutes per session, and 100 new connections per minute per resource.</a:t>
-            </a:r>
-          </a:p>
-          <a:p>
-            <a:r>
-              <a:t>Likely question: does our backend have to proxy the audio? Not necessarily. Browsers can connect over WebRTC, but key-based authentication is not available in a browser.</a:t>
-            </a:r>
+              <a:rPr lang="en-US"/>
+              <a:t>This slide shows the flow of a Voice Live session. Read it by the numbered steps: the client, the session setup, the runtime, the tools and the reply.
+The core idea is that a single WebSocket connection carries audio, events and tool calls in both directions.
+First, the connection.
+The client gets a Microsoft Entra ID token and opens a WebSocket to the Foundry resource endpoint, on the path voice-live/realtime. Entra ID is the recommended option. An API key also works, except in agent mode.
+Second, the session setup.
+The first event is normally session.update, which sets the voice, turn detection and noise options. The service replies with session.updated, and the client then streams audio chunks with input_audio_buffer.append.
+Third, the runtime processes the audio.
+Noise suppression and echo cancellation clean the audio. Turn detection decides when the caller has finished speaking, and recognition produces the transcript.
+Fourth, the model and tools.
+The model reasons and may call tools. These can be functions the client runs, remote Model Context Protocol servers, a Foundry agent, or built-in search.
+Fifth, the reply.
+Speech synthesis streams the reply back as response.audio.delta events, with avatar video if one is configured.
+Barge-in is on by default. The official documentation recommends WebRTC for browser clients; WebRTC is preview.
+Two limits apply: up to 60 minutes per session, and 100 new connections per minute per resource.
+A common question is whether the customer's backend has to proxy the audio. Not necessarily: browsers can connect over WebRTC, but key-based authentication is not available in a browser.
+The architectural principle is one session per conversation: the client sets it up with session.update, streams audio into it, and receives audio, events and tool calls back over the same connection.</a:t>
+            </a:r>
+            <a:endParaRPr/>
           </a:p>
         </p:txBody>
       </p:sp>
@@ -926,38 +938,21 @@
           <a:lstStyle/>
           <a:p>
             <a:r>
-              <a:t>There is no architecture setting to configure. Voice Live derives the architecture from the selected model, and Learn describes two outcomes.</a:t>
-            </a:r>
-          </a:p>
-          <a:p>
-            <a:r>
-              <a:t>Single speech model, which Learn calls native speech-to-speech: the caller's audio goes straight into a realtime speech model, and spoken audio comes straight back. This gives the lowest latency and the most natural turn-taking.</a:t>
-            </a:r>
-          </a:p>
-          <a:p>
-            <a:r>
-              <a:t>Three stages, which Learn calls cascaded: Azure speech recognition turns the audio into text, a text model such as gpt-4.1 or gpt-5 answers, and Azure speech synthesis speaks the reply. This allows a wider choice of models and voices, plus custom speech recognition and phrase lists, but every stage adds latency.</a:t>
-            </a:r>
-          </a:p>
-          <a:p>
-            <a:r>
-              <a:t>On the right, the pricing tier. Pro, Standard and Lite are not plans to purchase; the model sets the tier. Billing is per token, split into text, audio and native audio. Audio runs at roughly ten input and twenty output tokens per second.</a:t>
-            </a:r>
-          </a:p>
-          <a:p>
-            <a:r>
-              <a:t>Self-deployed models, documented as bring your own model, cover tested models that are not pre-deployed.</a:t>
-            </a:r>
-          </a:p>
-          <a:p>
-            <a:r>
-              <a:t>Presenter note: verify current per-token prices on the Azure Speech pricing page before quoting numbers.</a:t>
-            </a:r>
-          </a:p>
-          <a:p>
-            <a:r>
-              <a:t>Likely question: which option costs least? Lite-tier text models usually do, but test whether the latency is acceptable for callers.</a:t>
-            </a:r>
+              <a:rPr lang="en-US"/>
+              <a:t>This slide explains the two model architectures and the pricing tiers. Read it from top to bottom: the single speech model, the three stages, and then the pricing tier table.
+The core idea is that there is no architecture setting to configure. Voice Live derives the architecture from the selected model, and the official documentation describes two outcomes.
+First, the single speech model.
+The official documentation calls this native speech-to-speech. The caller's audio goes straight into a realtime speech model, and spoken audio comes straight back. This gives the lowest latency and the most natural turn-taking.
+Second, the three stages.
+The official documentation calls this cascaded. Azure speech recognition turns the audio into text, a text model such as gpt-4.1 or gpt-5 answers, and Azure speech synthesis speaks the reply. This allows a wider choice of models and voices, plus custom speech recognition and phrase lists, but every stage adds latency.
+Third, the pricing tier.
+Pro, Standard and Lite are not plans to purchase; the model sets the tier. Billing is per token, split into text, audio and native audio. Audio runs at roughly ten input and twenty output tokens per second.
+Self-deployed models, documented as the customer bringing its own model, cover tested models that are not pre-deployed.
+Current per-token prices change, so they should be confirmed on the Azure Speech pricing page before presenting or quoting numbers.
+A common question is which option costs least. Lite-tier text models usually do, but the customer should test whether the latency is acceptable for callers.
+The key takeaway is that choosing the model is the one decision that sets both the architecture and the pricing tier, so it should be made by weighing latency against model and voice choice.</a:t>
+            </a:r>
+            <a:endParaRPr/>
           </a:p>
         </p:txBody>
       </p:sp>
@@ -1026,38 +1021,23 @@
           <a:lstStyle/>
           <a:p>
             <a:r>
-              <a:t>A voice agent is a new agent kind in Foundry Agent Service, with kind set to voice. It uses the same management operations as prompt and hosted agents.</a:t>
-            </a:r>
-          </a:p>
-          <a:p>
-            <a:r>
-              <a:t>The definition is grouped by what each part does. Model sets model_type: managed, billed through the service, or self_deployed, which runs on your own deployment so existing capacity commitments apply. The service works out the real-time or cascaded architecture from the model.</a:t>
-            </a:r>
-          </a:p>
-          <a:p>
-            <a:r>
-              <a:t>Behaviour holds instructions and an optional greeting. Listening and Speaking hold the audio settings from the previous slide. Actions are tools. interim_response covers what the agent says while it waits for a slow tool. Data controls whether transcripts and audio are kept. Recording is off by default.</a:t>
-            </a:r>
-          </a:p>
-          <a:p>
-            <a:r>
-              <a:t>Each update creates a new immutable version, so you can pin one in production.</a:t>
-            </a:r>
-          </a:p>
-          <a:p>
-            <a:r>
-              <a:t>For an existing text agent, attach it as a subagent. It must be in the same project, and subagents aren't supported in projects isolated in a virtual network.</a:t>
-            </a:r>
-          </a:p>
-          <a:p>
-            <a:r>
-              <a:t>Presenter note: verify property names against the configure-voice-agent page, because the feature is in preview.</a:t>
-            </a:r>
-          </a:p>
-          <a:p>
-            <a:r>
-              <a:t>Likely question: can it reach our phone system directly over SIP? Direct SIP is not a supported customer flow today. Use Teams Phone or Twilio.</a:t>
-            </a:r>
+              <a:rPr lang="en-US"/>
+              <a:t>This slide explains the voice agent definition and its lifecycle. Read it from top to bottom: the definition part by part, then the four lifecycle steps.
+The core idea is that a voice agent is a new agent kind in Foundry Agent Service, with kind set to voice. It uses the same management operations as prompt and hosted agents.
+First, the model.
+The definition is grouped by what each part does. Model sets model_type: managed, which is billed through the service, or self_deployed, which runs on the customer's own deployment so existing capacity commitments apply. The service works out the real-time or cascaded architecture from the model.
+Second, behaviour, listening and speaking.
+Behaviour holds the instructions and an optional greeting. Listening and Speaking hold the audio settings from the previous slides.
+Third, actions, latency and data.
+Actions are the tools. interim_response covers what the agent says while it waits for a slow tool. Data controls whether transcripts and audio are kept. Recording is off by default.
+Fourth, the lifecycle.
+Each update creates a new immutable version, so operators can pin one in production.
+For an existing text agent, the approach is to attach it as a subagent. It must be in the same project, and subagents are not supported in projects isolated in a virtual network.
+Because the feature is in preview, the property names should be confirmed against the configure-voice-agent page before presenting.
+A common question is whether a voice agent can reach the customer's phone system directly over SIP. It cannot: direct SIP is not a supported customer flow today, and Teams Phone or Twilio should be used instead.
+The key takeaway is that a voice agent keeps everything about the conversation in one versioned definition, while existing text agents are reused as subagents rather than converted.</a:t>
+            </a:r>
+            <a:endParaRPr/>
           </a:p>
         </p:txBody>
       </p:sp>
@@ -1126,38 +1106,20 @@
           <a:lstStyle/>
           <a:p>
             <a:r>
-              <a:t>Two short examples, both illustrative rather than copy-and-paste.</a:t>
-            </a:r>
-          </a:p>
-          <a:p>
-            <a:r>
-              <a:t>Example one is path two from slide 3: connecting Voice Live to an agent you already run in Foundry. With the azure-ai-voicelive SDK, you pass agent_name and project_name as keyword arguments to connect. agent_version is optional and pins behaviour. Two caveats from Learn. First, agent mode requires Microsoft Entra ID; key-based authentication is not supported. Second, the agent's thread history stores text turns, not exactly what the caller heard. If the caller interrupts, handle truncation so the history doesn't claim the caller heard the full reply.</a:t>
-            </a:r>
-          </a:p>
-          <a:p>
-            <a:r>
-              <a:t>Example two is the session.update event. azure_semantic_vad uses meaning, not only silence, to decide the caller has finished. Learn calls it a key difference from the Azure OpenAI Realtime API. A multilingual variant also exists. Deep noise suppression and server echo cancellation are switched on here, along with a high-definition Azure voice.</a:t>
-            </a:r>
-          </a:p>
-          <a:p>
-            <a:r>
-              <a:t>For a voice agent, the same settings live in the agent definition as session defaults.</a:t>
-            </a:r>
-          </a:p>
-          <a:p>
-            <a:r>
-              <a:t>Samples: github.com/microsoft-foundry/voicelive-samples.</a:t>
-            </a:r>
-          </a:p>
-          <a:p>
-            <a:r>
-              <a:t>Presenter note: verify the SDK signature against the current azure-ai-voicelive release before demonstrating.</a:t>
-            </a:r>
-          </a:p>
-          <a:p>
-            <a:r>
-              <a:t>Likely question: is there a .NET SDK? Yes, Azure.AI.VoiceLive. SDKs also exist for Java and JavaScript.</a:t>
-            </a:r>
+              <a:rPr lang="en-US"/>
+              <a:t>This slide shows two short code examples. Both are illustrative rather than copy-and-paste. Read it from left to right: connecting to an existing agent, then configuring the session.
+The core idea is that the same speech settings apply whether they are sent at the start of a session or held in an agent definition.
+First, connecting Voice Live to an existing Foundry agent.
+This is path two from slide 3. With the azure-ai-voicelive SDK, the client passes agent_name and project_name as keyword arguments to connect. agent_version is optional and pins behaviour. The official documentation adds two caveats. Agent mode requires Microsoft Entra ID; key-based authentication is not supported. And the agent's thread history stores text turns, not exactly what the caller heard. If the caller interrupts, the client application should handle truncation so the history does not claim the caller heard the full reply.
+Second, the session.update event.
+azure_semantic_vad uses meaning, not only silence, to decide the caller has finished. The official documentation calls it a key difference from the Azure OpenAI Realtime API. A multilingual variant also exists. Deep noise suppression and server echo cancellation are switched on here, along with a high-definition Azure voice.
+For a voice agent, the same settings live in the agent definition as session defaults.
+Samples are at github.com/microsoft-foundry/voicelive-samples.
+The SDK signature should be confirmed against the current azure-ai-voicelive release before demonstrating.
+A common question is whether there is a .NET SDK. There is: Azure.AI.VoiceLive. SDKs also exist for Java and JavaScript.
+The key takeaway is that connecting to an existing agent takes only a few parameters, but it requires Entra ID and careful handling of interrupted replies in the thread history.</a:t>
+            </a:r>
+            <a:endParaRPr/>
           </a:p>
         </p:txBody>
       </p:sp>
@@ -1226,28 +1188,20 @@
           <a:lstStyle/>
           <a:p>
             <a:r>
-              <a:t>The most common confusion is between Voice Live and the Azure OpenAI Realtime API. The second is between connecting Voice Live to an agent and building a voice agent. Each column answers the same seven questions.</a:t>
-            </a:r>
-          </a:p>
-          <a:p>
-            <a:r>
-              <a:t>Realtime API compared with Voice Live: the Voice Live FAQ lists what Voice Live adds. More models, including text models such as gpt-4.1 and gpt-5. More voices and languages. Avatars. Semantic turn detection. Foundry agent integration. Telephony through Azure Communication Services. The events are compatible, so it is an upgrade path.</a:t>
-            </a:r>
-          </a:p>
-          <a:p>
-            <a:r>
-              <a:t>Voice Live with an agent compared with a voice agent: this comes from Microsoft's migration guidance. Connecting Voice Live to a text agent limits you to that agent's text model. Telephony is yours to integrate, and the agent trace does not include turn detection or audio. A voice agent adds speech-to-speech models, built-in Teams Phone and Twilio, voice-pipeline tracing and opt-in recordings. Today it is preview.</a:t>
-            </a:r>
-          </a:p>
-          <a:p>
-            <a:r>
-              <a:t>Presenter note: the migration guide was published on GitHub on 30 September; verify it is live on Learn before citing it.</a:t>
-            </a:r>
-          </a:p>
-          <a:p>
-            <a:r>
-              <a:t>Likely question: is Mistral or another speech model supported? Only the models listed on Learn, plus bring-your-own for the models Voice Live has tested.</a:t>
-            </a:r>
+              <a:rPr lang="en-US"/>
+              <a:t>This slide compares the real-time voice options on the same criteria. Read it as four columns, each answering the same seven questions.
+The core idea is that there are two common confusions. The most common is between Voice Live and the Azure OpenAI Realtime API. The second is between connecting Voice Live to an agent and building a voice agent.
+First, the Azure OpenAI Realtime API compared with Voice Live.
+The Voice Live FAQ lists what Voice Live adds: more models, including text models such as gpt-4.1 and gpt-5; more voices and languages; avatars; semantic turn detection; Foundry agent integration; and telephony through Azure Communication Services. The events are compatible, so it is an upgrade path.
+Second, Voice Live with an agent compared with a voice agent.
+This comparison comes from Microsoft's migration guidance. Connecting Voice Live to a text agent limits the conversation to that agent's text model. Telephony is the customer's to integrate, and the agent trace does not include turn detection or audio.
+Third, what the voice agent adds.
+A voice agent adds speech-to-speech models, built-in Teams Phone and Twilio, voice-pipeline tracing and opt-in recordings. Today it is preview.
+The migration guide was published on GitHub on 30 September, so whether it is live on Microsoft Learn should be confirmed before presenting or citing it.
+A common question is whether Mistral or another speech model is supported. Only the models listed in the official documentation are, plus a model the customer brings itself, for the models Voice Live has tested.
+The key takeaway is that Voice Live is an upgrade path from the Realtime API, and a voice agent adds telephony, voice tracing and speech-to-speech models on top of connecting an existing agent, at the cost of preview status.</a:t>
+            </a:r>
+            <a:endParaRPr/>
           </a:p>
         </p:txBody>
       </p:sp>
@@ -1316,43 +1270,22 @@
           <a:lstStyle/>
           <a:p>
             <a:r>
-              <a:t>Three questions settle most decisions.</a:t>
-            </a:r>
-          </a:p>
-          <a:p>
-            <a:r>
-              <a:t>First, do you already run a Foundry agent? If yes, connect Voice Live to it by agent name. You keep your agent, and this path is generally available. If not, a voice agent is the shortest route and the one Microsoft recommends for new work, but it is preview.</a:t>
-            </a:r>
-          </a:p>
-          <a:p>
-            <a:r>
-              <a:t>Second, do you need your own voice framework? Hosted agents support this through the Invocations WebSocket protocol, a single full-duplex connection to your container. You then own media handling yourself. Hosted agents provide no managed WebRTC, TURN or signalling service, and connections last about 30 minutes.</a:t>
-            </a:r>
-          </a:p>
-          <a:p>
-            <a:r>
-              <a:t>Third, do you need a service level agreement today? If so, stay on the generally available Voice Live paths.</a:t>
-            </a:r>
-          </a:p>
-          <a:p>
-            <a:r>
-              <a:t>The limits are per resource on the Standard tier. Older FAQ figures are out of date.</a:t>
-            </a:r>
-          </a:p>
-          <a:p>
-            <a:r>
-              <a:t>For Swiss customers, Switzerland North has agent support. Check model availability by deployment type on the regions page.</a:t>
-            </a:r>
-          </a:p>
-          <a:p>
-            <a:r>
-              <a:t>Presenter note: verify the region and quota tables on the day, because both change often.</a:t>
-            </a:r>
-          </a:p>
-          <a:p>
-            <a:r>
-              <a:t>Likely question: can we raise the quotas? Yes. Request an increase through the standard quota process.</a:t>
-            </a:r>
+              <a:rPr lang="en-US"/>
+              <a:t>This slide lists the selection questions, the operating limits and the release status. Read it from left to right: three questions, then limits, then status.
+The core idea is that three questions settle most decisions.
+First, an existing Foundry agent.
+If the customer already runs a Foundry agent, the guidance is to connect Voice Live to it by agent name. The customer keeps the agent, and this path is generally available. If not, a voice agent is the shortest route and the one Microsoft recommends for new work, but it is preview.
+Second, a custom voice framework.
+Hosted agents support this through the Invocations WebSocket protocol, a single full-duplex connection to the container. The development team then owns media handling itself. Hosted agents provide no managed WebRTC, TURN or signalling service, and connections last about 30 minutes.
+Third, a service level agreement.
+If the customer needs a service level agreement today, the guidance is to stay on the generally available Voice Live paths.
+The limits are per resource on the Standard tier. Older FAQ figures are out of date.
+For Swiss customers, Switzerland North has agent support. Model availability by deployment type should be checked on the regions page.
+Because both the region and quota tables change often, they should be confirmed on the day before presenting.
+A common question is whether the quotas can be raised. They can: an increase is requested through the standard quota process.
+The key takeaway is to choose by three facts about the customer: whether an agent already exists, whether a custom voice framework is required, and whether a service level agreement is needed now.</a:t>
+            </a:r>
+            <a:endParaRPr/>
           </a:p>
         </p:txBody>
       </p:sp>
@@ -1555,7 +1488,7 @@
           <a:p>
             <a:fld id="{5BCAD085-E8A6-8845-BD4E-CB4CCA059FC4}" type="datetimeFigureOut">
               <a:rPr lang="en-US" smtClean="0"/>
-              <a:t>10/11/2026</a:t>
+              <a:t>10/14/2026</a:t>
             </a:fld>
             <a:endParaRPr lang="en-US"/>
           </a:p>
@@ -1723,7 +1656,7 @@
           <a:p>
             <a:fld id="{5BCAD085-E8A6-8845-BD4E-CB4CCA059FC4}" type="datetimeFigureOut">
               <a:rPr lang="en-US" smtClean="0"/>
-              <a:t>10/11/2026</a:t>
+              <a:t>10/14/2026</a:t>
             </a:fld>
             <a:endParaRPr lang="en-US"/>
           </a:p>
@@ -1901,7 +1834,7 @@
           <a:p>
             <a:fld id="{5BCAD085-E8A6-8845-BD4E-CB4CCA059FC4}" type="datetimeFigureOut">
               <a:rPr lang="en-US" smtClean="0"/>
-              <a:t>10/11/2026</a:t>
+              <a:t>10/14/2026</a:t>
             </a:fld>
             <a:endParaRPr lang="en-US"/>
           </a:p>
@@ -2069,7 +2002,7 @@
           <a:p>
             <a:fld id="{5BCAD085-E8A6-8845-BD4E-CB4CCA059FC4}" type="datetimeFigureOut">
               <a:rPr lang="en-US" smtClean="0"/>
-              <a:t>10/11/2026</a:t>
+              <a:t>10/14/2026</a:t>
             </a:fld>
             <a:endParaRPr lang="en-US"/>
           </a:p>
@@ -2314,7 +2247,7 @@
           <a:p>
             <a:fld id="{5BCAD085-E8A6-8845-BD4E-CB4CCA059FC4}" type="datetimeFigureOut">
               <a:rPr lang="en-US" smtClean="0"/>
-              <a:t>10/11/2026</a:t>
+              <a:t>10/14/2026</a:t>
             </a:fld>
             <a:endParaRPr lang="en-US"/>
           </a:p>
@@ -2599,7 +2532,7 @@
           <a:p>
             <a:fld id="{5BCAD085-E8A6-8845-BD4E-CB4CCA059FC4}" type="datetimeFigureOut">
               <a:rPr lang="en-US" smtClean="0"/>
-              <a:t>10/11/2026</a:t>
+              <a:t>10/14/2026</a:t>
             </a:fld>
             <a:endParaRPr lang="en-US"/>
           </a:p>
@@ -3018,7 +2951,7 @@
           <a:p>
             <a:fld id="{5BCAD085-E8A6-8845-BD4E-CB4CCA059FC4}" type="datetimeFigureOut">
               <a:rPr lang="en-US" smtClean="0"/>
-              <a:t>10/11/2026</a:t>
+              <a:t>10/14/2026</a:t>
             </a:fld>
             <a:endParaRPr lang="en-US"/>
           </a:p>
@@ -3135,7 +3068,7 @@
           <a:p>
             <a:fld id="{5BCAD085-E8A6-8845-BD4E-CB4CCA059FC4}" type="datetimeFigureOut">
               <a:rPr lang="en-US" smtClean="0"/>
-              <a:t>10/11/2026</a:t>
+              <a:t>10/14/2026</a:t>
             </a:fld>
             <a:endParaRPr lang="en-US"/>
           </a:p>
@@ -3230,7 +3163,7 @@
           <a:p>
             <a:fld id="{5BCAD085-E8A6-8845-BD4E-CB4CCA059FC4}" type="datetimeFigureOut">
               <a:rPr lang="en-US" smtClean="0"/>
-              <a:t>10/11/2026</a:t>
+              <a:t>10/14/2026</a:t>
             </a:fld>
             <a:endParaRPr lang="en-US"/>
           </a:p>
@@ -3505,7 +3438,7 @@
           <a:p>
             <a:fld id="{5BCAD085-E8A6-8845-BD4E-CB4CCA059FC4}" type="datetimeFigureOut">
               <a:rPr lang="en-US" smtClean="0"/>
-              <a:t>10/11/2026</a:t>
+              <a:t>10/14/2026</a:t>
             </a:fld>
             <a:endParaRPr lang="en-US"/>
           </a:p>
@@ -3757,7 +3690,7 @@
           <a:p>
             <a:fld id="{5BCAD085-E8A6-8845-BD4E-CB4CCA059FC4}" type="datetimeFigureOut">
               <a:rPr lang="en-US" smtClean="0"/>
-              <a:t>10/11/2026</a:t>
+              <a:t>10/14/2026</a:t>
             </a:fld>
             <a:endParaRPr lang="en-US"/>
           </a:p>
@@ -3968,7 +3901,7 @@
           <a:p>
             <a:fld id="{5BCAD085-E8A6-8845-BD4E-CB4CCA059FC4}" type="datetimeFigureOut">
               <a:rPr lang="en-US" smtClean="0"/>
-              <a:t>10/11/2026</a:t>
+              <a:t>10/14/2026</a:t>
             </a:fld>
             <a:endParaRPr lang="en-US"/>
           </a:p>
